--- a/reports/Save_you_in_history_presentation.pptx
+++ b/reports/Save_you_in_history_presentation.pptx
@@ -3425,7 +3425,7 @@
               </a:defRPr>
             </a:pPr>
             <a:r>
-              <a:t>Айрапетян Эрик · НОД / spring 2026</a:t>
+              <a:t>НОД / spring 2026</a:t>
             </a:r>
           </a:p>
         </p:txBody>
